--- a/docs/PROGRESS_SLIDES_2026-06-03.pptx
+++ b/docs/PROGRESS_SLIDES_2026-06-03.pptx
@@ -12955,7 +12955,7 @@
                 </a:solidFill>
                 <a:latin typeface="Calibri"/>
               </a:rPr>
-              <a:t>Cost tracking and rolling budget</a:t>
+              <a:t>Cost tracking</a:t>
             </a:r>
           </a:p>
         </p:txBody>
@@ -12990,7 +12990,7 @@
                 </a:solidFill>
                 <a:latin typeface="Calibri"/>
               </a:rPr>
-              <a:t>Costs page shows the 5-hour rolling spend, per-model breakdown, and per-strategy averages. Rate-limit hits and soft-limit progress on every page's sidebar.</a:t>
+              <a:t>Costs page shows the 5-hour rolling spend, per-model breakdown, and per-strategy averages. Rolling 5-hour spend and rate-limit hits on every page's sidebar.</a:t>
             </a:r>
           </a:p>
         </p:txBody>
